--- a/lesson_07-ux_and_ui_in_flutter/lesson_07-ux_and_ui_in_flutter.pptx
+++ b/lesson_07-ux_and_ui_in_flutter/lesson_07-ux_and_ui_in_flutter.pptx
@@ -234,7 +234,7 @@
           <a:p>
             <a:fld id="{251090E0-FB0C-49E9-9864-9F53EABEA96F}" type="datetimeFigureOut">
               <a:rPr lang="en-GB" smtClean="0"/>
-              <a:t>11/02/2026</a:t>
+              <a:t>19/02/2026</a:t>
             </a:fld>
             <a:endParaRPr lang="en-GB"/>
           </a:p>
@@ -6004,7 +6004,9 @@
             </a:r>
             <a:r>
               <a:rPr lang="en-US" sz="2000" dirty="0" err="1">
-                <a:latin typeface="Aptos" panose="020B0004020202020204" pitchFamily="34" charset="0"/>
+                <a:latin typeface="Menlo" panose="020B0609030804020204" pitchFamily="49" charset="0"/>
+                <a:ea typeface="Menlo" panose="020B0609030804020204" pitchFamily="49" charset="0"/>
+                <a:cs typeface="Menlo" panose="020B0609030804020204" pitchFamily="49" charset="0"/>
               </a:rPr>
               <a:t>ThemeData</a:t>
             </a:r>
@@ -19896,7 +19898,11 @@
               <a:t>Use </a:t>
             </a:r>
             <a:r>
-              <a:rPr lang="en-US" dirty="0" err="1"/>
+              <a:rPr lang="en-US" dirty="0" err="1">
+                <a:latin typeface="Menlo" panose="020B0609030804020204" pitchFamily="49" charset="0"/>
+                <a:ea typeface="Menlo" panose="020B0609030804020204" pitchFamily="49" charset="0"/>
+                <a:cs typeface="Menlo" panose="020B0609030804020204" pitchFamily="49" charset="0"/>
+              </a:rPr>
               <a:t>ListView</a:t>
             </a:r>
             <a:r>
@@ -20256,7 +20262,26 @@
                 <a:ea typeface="Menlo" panose="020B0609030804020204" pitchFamily="49" charset="0"/>
                 <a:cs typeface="Menlo" panose="020B0609030804020204" pitchFamily="49" charset="0"/>
               </a:rPr>
-              <a:t>        leading: Icon(</a:t>
+              <a:t>        </a:t>
+            </a:r>
+            <a:r>
+              <a:rPr lang="en-GB" dirty="0">
+                <a:solidFill>
+                  <a:srgbClr val="C00000"/>
+                </a:solidFill>
+                <a:latin typeface="Menlo" panose="020B0609030804020204" pitchFamily="49" charset="0"/>
+                <a:ea typeface="Menlo" panose="020B0609030804020204" pitchFamily="49" charset="0"/>
+                <a:cs typeface="Menlo" panose="020B0609030804020204" pitchFamily="49" charset="0"/>
+              </a:rPr>
+              <a:t>leading</a:t>
+            </a:r>
+            <a:r>
+              <a:rPr lang="en-GB" dirty="0">
+                <a:latin typeface="Menlo" panose="020B0609030804020204" pitchFamily="49" charset="0"/>
+                <a:ea typeface="Menlo" panose="020B0609030804020204" pitchFamily="49" charset="0"/>
+                <a:cs typeface="Menlo" panose="020B0609030804020204" pitchFamily="49" charset="0"/>
+              </a:rPr>
+              <a:t>: Icon(</a:t>
             </a:r>
             <a:r>
               <a:rPr lang="en-GB" dirty="0" err="1">
@@ -20282,7 +20307,26 @@
                 <a:ea typeface="Menlo" panose="020B0609030804020204" pitchFamily="49" charset="0"/>
                 <a:cs typeface="Menlo" panose="020B0609030804020204" pitchFamily="49" charset="0"/>
               </a:rPr>
-              <a:t>        title: Text('</a:t>
+              <a:t>        </a:t>
+            </a:r>
+            <a:r>
+              <a:rPr lang="en-GB" dirty="0">
+                <a:solidFill>
+                  <a:srgbClr val="C00000"/>
+                </a:solidFill>
+                <a:latin typeface="Menlo" panose="020B0609030804020204" pitchFamily="49" charset="0"/>
+                <a:ea typeface="Menlo" panose="020B0609030804020204" pitchFamily="49" charset="0"/>
+                <a:cs typeface="Menlo" panose="020B0609030804020204" pitchFamily="49" charset="0"/>
+              </a:rPr>
+              <a:t>title</a:t>
+            </a:r>
+            <a:r>
+              <a:rPr lang="en-GB" dirty="0">
+                <a:latin typeface="Menlo" panose="020B0609030804020204" pitchFamily="49" charset="0"/>
+                <a:ea typeface="Menlo" panose="020B0609030804020204" pitchFamily="49" charset="0"/>
+                <a:cs typeface="Menlo" panose="020B0609030804020204" pitchFamily="49" charset="0"/>
+              </a:rPr>
+              <a:t>: Text('</a:t>
             </a:r>
             <a:r>
               <a:rPr lang="en-GB" dirty="0" err="1">
@@ -20308,7 +20352,26 @@
                 <a:ea typeface="Menlo" panose="020B0609030804020204" pitchFamily="49" charset="0"/>
                 <a:cs typeface="Menlo" panose="020B0609030804020204" pitchFamily="49" charset="0"/>
               </a:rPr>
-              <a:t>        subtitle: Text('</a:t>
+              <a:t>        </a:t>
+            </a:r>
+            <a:r>
+              <a:rPr lang="en-GB" dirty="0">
+                <a:solidFill>
+                  <a:srgbClr val="C00000"/>
+                </a:solidFill>
+                <a:latin typeface="Menlo" panose="020B0609030804020204" pitchFamily="49" charset="0"/>
+                <a:ea typeface="Menlo" panose="020B0609030804020204" pitchFamily="49" charset="0"/>
+                <a:cs typeface="Menlo" panose="020B0609030804020204" pitchFamily="49" charset="0"/>
+              </a:rPr>
+              <a:t>subtitle</a:t>
+            </a:r>
+            <a:r>
+              <a:rPr lang="en-GB" dirty="0">
+                <a:latin typeface="Menlo" panose="020B0609030804020204" pitchFamily="49" charset="0"/>
+                <a:ea typeface="Menlo" panose="020B0609030804020204" pitchFamily="49" charset="0"/>
+                <a:cs typeface="Menlo" panose="020B0609030804020204" pitchFamily="49" charset="0"/>
+              </a:rPr>
+              <a:t>: Text('</a:t>
             </a:r>
             <a:r>
               <a:rPr lang="en-GB" dirty="0" err="1">
@@ -20334,7 +20397,26 @@
                 <a:ea typeface="Menlo" panose="020B0609030804020204" pitchFamily="49" charset="0"/>
                 <a:cs typeface="Menlo" panose="020B0609030804020204" pitchFamily="49" charset="0"/>
               </a:rPr>
-              <a:t>        trailing: Icon(</a:t>
+              <a:t>        </a:t>
+            </a:r>
+            <a:r>
+              <a:rPr lang="en-GB" dirty="0">
+                <a:solidFill>
+                  <a:srgbClr val="C00000"/>
+                </a:solidFill>
+                <a:latin typeface="Menlo" panose="020B0609030804020204" pitchFamily="49" charset="0"/>
+                <a:ea typeface="Menlo" panose="020B0609030804020204" pitchFamily="49" charset="0"/>
+                <a:cs typeface="Menlo" panose="020B0609030804020204" pitchFamily="49" charset="0"/>
+              </a:rPr>
+              <a:t>trailing</a:t>
+            </a:r>
+            <a:r>
+              <a:rPr lang="en-GB" dirty="0">
+                <a:latin typeface="Menlo" panose="020B0609030804020204" pitchFamily="49" charset="0"/>
+                <a:ea typeface="Menlo" panose="020B0609030804020204" pitchFamily="49" charset="0"/>
+                <a:cs typeface="Menlo" panose="020B0609030804020204" pitchFamily="49" charset="0"/>
+              </a:rPr>
+              <a:t>: Icon(</a:t>
             </a:r>
             <a:r>
               <a:rPr lang="en-GB" dirty="0" err="1">

--- a/lesson_07-ux_and_ui_in_flutter/lesson_07-ux_and_ui_in_flutter.pptx
+++ b/lesson_07-ux_and_ui_in_flutter/lesson_07-ux_and_ui_in_flutter.pptx
@@ -234,7 +234,7 @@
           <a:p>
             <a:fld id="{251090E0-FB0C-49E9-9864-9F53EABEA96F}" type="datetimeFigureOut">
               <a:rPr lang="en-GB" smtClean="0"/>
-              <a:t>19/02/2026</a:t>
+              <a:t>27/02/2026</a:t>
             </a:fld>
             <a:endParaRPr lang="en-GB"/>
           </a:p>
@@ -5592,15 +5592,7 @@
           <a:p>
             <a:r>
               <a:rPr lang="en-US" dirty="0"/>
-              <a:t>In Flutter, Material is activated </a:t>
-            </a:r>
-            <a:r>
-              <a:rPr lang="en-US" dirty="0" err="1"/>
-              <a:t>providng</a:t>
-            </a:r>
-            <a:r>
-              <a:rPr lang="en-US" dirty="0"/>
-              <a:t> a </a:t>
+              <a:t>In Flutter, Material is activated providing a </a:t>
             </a:r>
             <a:r>
               <a:rPr lang="en-US" dirty="0" err="1">

--- a/lesson_07-ux_and_ui_in_flutter/lesson_07-ux_and_ui_in_flutter.pptx
+++ b/lesson_07-ux_and_ui_in_flutter/lesson_07-ux_and_ui_in_flutter.pptx
@@ -234,7 +234,7 @@
           <a:p>
             <a:fld id="{251090E0-FB0C-49E9-9864-9F53EABEA96F}" type="datetimeFigureOut">
               <a:rPr lang="en-GB" smtClean="0"/>
-              <a:t>27/02/2026</a:t>
+              <a:t>20/03/2026</a:t>
             </a:fld>
             <a:endParaRPr lang="en-GB"/>
           </a:p>
@@ -6158,15 +6158,7 @@
           <a:p>
             <a:r>
               <a:rPr lang="en-US" dirty="0"/>
-              <a:t>This </a:t>
-            </a:r>
-            <a:r>
-              <a:rPr lang="en-US" dirty="0" err="1"/>
-              <a:t>allos</a:t>
-            </a:r>
-            <a:r>
-              <a:rPr lang="en-US" dirty="0"/>
-              <a:t> also to express priorities.</a:t>
+              <a:t>This allows also to express priorities.</a:t>
             </a:r>
             <a:endParaRPr lang="it-IT" dirty="0"/>
           </a:p>
